--- a/EPS_RI/ro/fisiere/LP01.pptx
+++ b/EPS_RI/ro/fisiere/LP01.pptx
@@ -3220,7 +3220,7 @@
                 <a:ea typeface="Palatino Linotype" pitchFamily="34" charset="-122"/>
                 <a:cs typeface="Palatino Linotype" pitchFamily="34" charset="-120"/>
               </a:rPr>
-              <a:t>După ședința laboratorului am hotărât, împreună cu medicul coordonator, să facem ceva pentru copiii care vin la rezonanță magnetică.</a:t>
+              <a:t>După ședința laboratorului am hotărât, împreună cu medicul coordonator, să facem ceva pentru copiii care vin la examenul RMN.</a:t>
             </a:r>
             <a:endParaRPr lang="en-US" sz="1600" dirty="0"/>
           </a:p>
@@ -3288,7 +3288,7 @@
                 <a:ea typeface="Palatino Linotype" pitchFamily="34" charset="-122"/>
                 <a:cs typeface="Palatino Linotype" pitchFamily="34" charset="-120"/>
               </a:rPr>
-              <a:t>Propun „un pliant pentru părinți, dat la internare, cu ce trebuie să știe despre rezonanța magnetică”.</a:t>
+              <a:t>Propun „un pliant pentru părinți, dat la internare, cu ce trebuie să știe despre examenul RMN”.</a:t>
             </a:r>
             <a:endParaRPr lang="en-US" sz="1700" dirty="0"/>
           </a:p>
@@ -4427,7 +4427,7 @@
                 <a:ea typeface="Palatino Linotype" pitchFamily="34" charset="-122"/>
                 <a:cs typeface="Palatino Linotype" pitchFamily="34" charset="-120"/>
               </a:rPr>
-              <a:t>„Dacă pregătim bine copiii, nu mai este nevoie de anestezie la rezonanța magnetică.”</a:t>
+              <a:t>„Dacă pregătim bine copiii, nu mai este nevoie de anestezie la examenul RMN.”</a:t>
             </a:r>
             <a:endParaRPr lang="en-US" sz="3100" dirty="0"/>
           </a:p>
@@ -4812,7 +4812,7 @@
                 <a:ea typeface="Palatino Linotype" pitchFamily="34" charset="-122"/>
                 <a:cs typeface="Palatino Linotype" pitchFamily="34" charset="-120"/>
               </a:rPr>
-              <a:t>Protocolul unei recenzii daneze a studiilor despre rezonanța magnetică la copii.</a:t>
+              <a:t>Protocolul unei recenzii daneze a studiilor despre examenul RMN la copii.</a:t>
             </a:r>
             <a:endParaRPr lang="en-US" sz="1100" dirty="0"/>
           </a:p>
@@ -6903,7 +6903,7 @@
                 <a:ea typeface="Palatino Linotype" pitchFamily="34" charset="-122"/>
                 <a:cs typeface="Palatino Linotype" pitchFamily="34" charset="-120"/>
               </a:rPr>
-              <a:t>„Până la sfârșitul anului, proporția rezonanțelor făcute cu sedare sau anestezie la copiii de 3–10 ani programați în laborator scade de la 50% la 40%, numărată din registrul secției, înainte și după program.”</a:t>
+              <a:t>„Până la sfârșitul anului, proporția examenelor RMN făcute cu sedare sau anestezie la copiii de 3–10 ani programați în laborator scade de la 50% la 40%, numărată din registrul secției, înainte și după program.”</a:t>
             </a:r>
             <a:endParaRPr lang="en-US" sz="1450" dirty="0"/>
           </a:p>
@@ -7216,7 +7216,7 @@
                 <a:ea typeface="Palatino Linotype" pitchFamily="34" charset="-122"/>
                 <a:cs typeface="Palatino Linotype" pitchFamily="34" charset="-120"/>
               </a:rPr>
-              <a:t>Pregătirea copiilor de 3–10 ani pentru rezonanța magnetică fără sedare</a:t>
+              <a:t>Pregătirea copiilor de 3–10 ani pentru examenul RMN fără sedare</a:t>
             </a:r>
             <a:endParaRPr lang="en-US" sz="1550" dirty="0"/>
           </a:p>
@@ -7349,7 +7349,7 @@
                 <a:ea typeface="Palatino Linotype" pitchFamily="34" charset="-122"/>
                 <a:cs typeface="Palatino Linotype" pitchFamily="34" charset="-120"/>
               </a:rPr>
-              <a:t>Părinții copiilor cu lovituri ușoare la cap care cer o tomografie „ca să fim siguri”</a:t>
+              <a:t>Părinții copiilor cu lovituri ușoare la cap care cer un examen CT „ca să fim siguri”</a:t>
             </a:r>
             <a:endParaRPr lang="en-US" sz="1550" dirty="0"/>
           </a:p>
@@ -7560,7 +7560,7 @@
                 <a:ea typeface="Palatino Linotype" pitchFamily="34" charset="-122"/>
                 <a:cs typeface="Palatino Linotype" pitchFamily="34" charset="-120"/>
               </a:rPr>
-              <a:t>Pentru tema B: sub 10 ani, un caz suplimentar de leucemie și unul de tumoră cerebrală la 10 000 de tomografii ale capului (Marea Britanie, 1985–2002).</a:t>
+              <a:t>Pentru tema B: sub 10 ani, un caz suplimentar de leucemie și unul de tumoră cerebrală la 10 000 de examene CT ale capului (Marea Britanie, 1985–2002).</a:t>
             </a:r>
             <a:endParaRPr lang="en-US" sz="1350" dirty="0"/>
           </a:p>
@@ -8316,7 +8316,7 @@
                 <a:ea typeface="Palatino Linotype" pitchFamily="34" charset="-122"/>
                 <a:cs typeface="Palatino Linotype" pitchFamily="34" charset="-120"/>
               </a:rPr>
-              <a:t>Multe rezonanțe la copii mici se fac cu sedare; proporția exactă, din registrul laboratorului.</a:t>
+              <a:t>Multe examene RMN la copii mici se fac cu sedare; proporția exactă, din registrul laboratorului.</a:t>
             </a:r>
             <a:endParaRPr lang="en-US" sz="1400" dirty="0"/>
           </a:p>
@@ -8454,7 +8454,7 @@
                 <a:ea typeface="Palatino Linotype" pitchFamily="34" charset="-122"/>
                 <a:cs typeface="Palatino Linotype" pitchFamily="34" charset="-120"/>
               </a:rPr>
-              <a:t>Copiii de 3–10 ani programați la rezonanță magnetică și părinții lor.</a:t>
+              <a:t>Copiii de 3–10 ani programați pentru examenul RMN și părinții lor.</a:t>
             </a:r>
             <a:endParaRPr lang="en-US" sz="1400" dirty="0"/>
           </a:p>
@@ -9254,7 +9254,7 @@
                 <a:ea typeface="Palatino Linotype" pitchFamily="34" charset="-122"/>
                 <a:cs typeface="Palatino Linotype" pitchFamily="34" charset="-120"/>
               </a:rPr>
-              <a:t>Câte rezonanțe magnetice se fac anual la copiii din România și câte dintre ele cu sedare?</a:t>
+              <a:t>Câte examene RMN se fac anual la copiii din România și câte dintre ele cu sedare?</a:t>
             </a:r>
             <a:endParaRPr lang="en-US" sz="2100" dirty="0"/>
           </a:p>
@@ -10873,7 +10873,7 @@
                 <a:ea typeface="Palatino Linotype" pitchFamily="34" charset="-122"/>
                 <a:cs typeface="Palatino Linotype" pitchFamily="34" charset="-120"/>
               </a:rPr>
-              <a:t>REZONANȚĂ · ANDREI, ȘASE ANI</a:t>
+              <a:t>EXAMENUL RMN · ANDREI, ȘASE ANI</a:t>
             </a:r>
             <a:endParaRPr lang="en-US" sz="1250" dirty="0"/>
           </a:p>
@@ -11203,7 +11203,7 @@
                 <a:ea typeface="Palatino Linotype" pitchFamily="34" charset="-122"/>
                 <a:cs typeface="Palatino Linotype" pitchFamily="34" charset="-120"/>
               </a:rPr>
-              <a:t>De ce nu stă nemișcat? Examinarea poate cere 45 de minute sau mai mult de stat nemișcat, într-un tunel care face zgomote puternice.</a:t>
+              <a:t>De ce nu stă nemișcat? Examenul prin rezonanță magnetică (RMN) poate cere 45 de minute sau mai mult de stat nemișcat, într-un tunel care face zgomote puternice.</a:t>
             </a:r>
             <a:endParaRPr lang="en-US" sz="1400" dirty="0"/>
           </a:p>
@@ -12189,7 +12189,7 @@
                 <a:ea typeface="Palatino Linotype" pitchFamily="34" charset="-122"/>
                 <a:cs typeface="Palatino Linotype" pitchFamily="34" charset="-120"/>
               </a:rPr>
-              <a:t>Câți dintre copiii programați la rezonanță magnetică ajung la examinare fără să știe ce îi așteaptă și ce putem schimba pentru toți?</a:t>
+              <a:t>Câți dintre copiii programați pentru examenul RMN ajung la examinare fără să știe ce îi așteaptă și ce putem schimba pentru toți?</a:t>
             </a:r>
             <a:endParaRPr lang="en-US" sz="1600" dirty="0"/>
           </a:p>
@@ -12993,7 +12993,7 @@
                 <a:ea typeface="Palatino Linotype" pitchFamily="34" charset="-122"/>
                 <a:cs typeface="Palatino Linotype" pitchFamily="34" charset="-120"/>
               </a:rPr>
-              <a:t>Un cartier, o școală, copiii unui județ trimiși la rezonanță magnetică și părinții lor.</a:t>
+              <a:t>Un cartier, o școală, copiii unui județ trimiși pentru examenul RMN și părinții lor.</a:t>
             </a:r>
             <a:endParaRPr lang="en-US" sz="1600" dirty="0"/>
           </a:p>
@@ -14964,7 +14964,7 @@
                 <a:ea typeface="Palatino Linotype" pitchFamily="34" charset="-122"/>
                 <a:cs typeface="Palatino Linotype" pitchFamily="34" charset="-120"/>
               </a:rPr>
-              <a:t>TOMOGRAFIE COMPUTERIZATĂ</a:t>
+              <a:t>TOMOGRAFIE COMPUTERIZATĂ (CT)</a:t>
             </a:r>
             <a:endParaRPr lang="en-US" sz="1300" dirty="0"/>
           </a:p>
@@ -15217,7 +15217,7 @@
                 <a:ea typeface="Palatino Linotype" pitchFamily="34" charset="-122"/>
                 <a:cs typeface="Palatino Linotype" pitchFamily="34" charset="-120"/>
               </a:rPr>
-              <a:t>REZONANȚĂ MAGNETICĂ</a:t>
+              <a:t>REZONANȚĂ MAGNETICĂ (RMN)</a:t>
             </a:r>
             <a:endParaRPr lang="en-US" sz="1300" dirty="0"/>
           </a:p>
@@ -15579,7 +15579,7 @@
                 <a:ea typeface="Palatino Linotype" pitchFamily="34" charset="-122"/>
                 <a:cs typeface="Palatino Linotype" pitchFamily="34" charset="-120"/>
               </a:rPr>
-              <a:t>Aproape o tomografie la zece locuitori într-un an. În cinci ani, tomografiile au crescut de aproape trei ori, rezonanțele de aproape patru ori.</a:t>
+              <a:t>Aproape un examen CT la zece locuitori într-un an. În cinci ani, examenele CT au crescut de aproape trei ori, examenele RMN de aproape patru ori.</a:t>
             </a:r>
             <a:endParaRPr lang="en-US" sz="1400" dirty="0"/>
           </a:p>
@@ -16588,7 +16588,7 @@
                 <a:ea typeface="Palatino Linotype" pitchFamily="34" charset="-122"/>
                 <a:cs typeface="Palatino Linotype" pitchFamily="34" charset="-120"/>
               </a:rPr>
-              <a:t>Din 2 000 de rezonanțe la copii mici. Cu alte valori, rezultatul se poate inversa.</a:t>
+              <a:t>Din 2 000 de examene RMN la copii mici. Cu alte valori, rezultatul se poate inversa.</a:t>
             </a:r>
             <a:endParaRPr lang="en-US" sz="1400" dirty="0"/>
           </a:p>
